--- a/public/fun/pack/pptx/weddingpro/결혼식프리미엄_26_소개중심_버건디샴페인.pptx
+++ b/public/fun/pack/pptx/weddingpro/결혼식프리미엄_26_소개중심_버건디샴페인.pptx
@@ -113,12 +113,12 @@
   <p:extLst>
     <p:ext uri="{521415D9-36F7-43E2-AB2F-B90AF26B5E84}">
       <p14:sectionLst xmlns:p14="http://schemas.microsoft.com/office/powerpoint/2010/main">
-        <p14:section name="시작" id="{A2656AF9-08E4-4E98-AD8D-DEFC9DB55758}">
+        <p14:section name="시작" id="{054B4874-1E74-461D-B1D3-3EF3A79EED0B}">
           <p14:sldIdLst>
             <p14:sldId id="256"/>
           </p14:sldIdLst>
         </p14:section>
-        <p14:section name="본문" id="{D5E00B28-90BA-4390-B45C-0AA5ADA20696}">
+        <p14:section name="본문" id="{A3EFF032-3BF7-417C-92B9-4AF25A237083}">
           <p14:sldIdLst>
             <p14:sldId id="257"/>
             <p14:sldId id="258"/>
@@ -127,7 +127,7 @@
             <p14:sldId id="261"/>
           </p14:sldIdLst>
         </p14:section>
-        <p14:section name="마무리" id="{816B6CBA-0BC8-4378-B6C9-411C8A693861}">
+        <p14:section name="마무리" id="{441E8C8C-8F30-4F17-9700-910F69BB7801}">
           <p14:sldIdLst>
             <p14:sldId id="262"/>
           </p14:sldIdLst>
@@ -1575,7 +1575,7 @@
             </a:lvl1pPr>
           </a:lstStyle>
           <a:p>
-            <a:fld id="{BF56139E-F85D-4966-9E54-0A6B4A0641D0}" type="slidenum">
+            <a:fld id="{76303F85-98EA-418E-913E-53C76B23EFD7}" type="slidenum">
               <a:rPr lang="en-US"/>
               <a:t>‹#›</a:t>
             </a:fld>
@@ -2612,7 +2612,7 @@
             </a:lvl1pPr>
           </a:lstStyle>
           <a:p>
-            <a:fld id="{4581229A-EB8F-47F9-BDE3-CB8B61531E13}" type="slidenum">
+            <a:fld id="{855FAED4-E72F-4B0D-BC35-3771173599ED}" type="slidenum">
               <a:rPr lang="en-US"/>
               <a:t>‹#›</a:t>
             </a:fld>
@@ -3622,7 +3622,7 @@
             </a:lvl1pPr>
           </a:lstStyle>
           <a:p>
-            <a:fld id="{4EDB4631-6EDA-4E2F-9C31-A514FDEEAF28}" type="slidenum">
+            <a:fld id="{4150B314-353C-41AE-B6BF-113F4D1871BF}" type="slidenum">
               <a:rPr lang="en-US"/>
               <a:t>‹#›</a:t>
             </a:fld>
@@ -4791,7 +4791,7 @@
           <a:p>
             <a:r>
               <a:rPr lang="ko-KR"/>
-              <a:t>0000. 00. 00 · 예식장 이름</a:t>
+              <a:t>날짜 입력 · 예식장 이름</a:t>
             </a:r>
           </a:p>
         </p:txBody>
@@ -5014,7 +5014,7 @@
           <a:bodyPr/>
           <a:lstStyle/>
           <a:p>
-            <a:fld id="{FA87D426-EE22-4B1E-9B67-E1E570C81F18}" type="slidenum">
+            <a:fld id="{8602E9F1-F718-4CFF-AB02-78A128EF3238}" type="slidenum">
               <a:rPr lang="en-US"/>
               <a:t>‹#›</a:t>
             </a:fld>
@@ -5422,7 +5422,7 @@
           <a:bodyPr/>
           <a:lstStyle/>
           <a:p>
-            <a:fld id="{1A20EA65-5089-42ED-9237-972421FFE824}" type="slidenum">
+            <a:fld id="{B4E7EE6C-BD6C-43B0-A2D8-0C02AAA4B2B5}" type="slidenum">
               <a:rPr lang="en-US"/>
               <a:t>‹#›</a:t>
             </a:fld>
@@ -6026,7 +6026,7 @@
           <a:bodyPr/>
           <a:lstStyle/>
           <a:p>
-            <a:fld id="{80E4B965-517A-4C03-B1D4-DD8504E2EBC3}" type="slidenum">
+            <a:fld id="{6D958D9B-E4B8-43D7-A722-AF253C4AD454}" type="slidenum">
               <a:rPr lang="en-US"/>
               <a:t>‹#›</a:t>
             </a:fld>
@@ -6970,7 +6970,7 @@
           <a:bodyPr/>
           <a:lstStyle/>
           <a:p>
-            <a:fld id="{E1870072-0DBE-4BE2-8D03-F6D306097470}" type="slidenum">
+            <a:fld id="{123DA1E7-ABA9-4CFD-B526-E0E30C63821A}" type="slidenum">
               <a:rPr lang="en-US"/>
               <a:t>‹#›</a:t>
             </a:fld>
@@ -7058,7 +7058,7 @@
           <a:bodyPr/>
           <a:lstStyle/>
           <a:p>
-            <a:fld id="{771585B2-587B-4A1B-870D-76A81FDDEB5E}" type="slidenum">
+            <a:fld id="{44597DE2-60C3-4BF1-BAC4-BAC7A6FE9A20}" type="slidenum">
               <a:rPr lang="en-US"/>
               <a:t>‹#›</a:t>
             </a:fld>
